--- a/generated/Tier 1 Broker Scorecards/Velocity Insurance Multiservices LLC_Broker_Scorecard.pptx
+++ b/generated/Tier 1 Broker Scorecards/Velocity Insurance Multiservices LLC_Broker_Scorecard.pptx
@@ -3357,7 +3357,7 @@
                         <a:rPr sz="800">
                           <a:latin typeface="Segoe UI"/>
                         </a:rPr>
-                        <a:t>$1,640,288.40 / $3,394,646.75 / $2,112,768.43</a:t>
+                        <a:t>$1,640,288.40 / $3,254,974.68 / $1,973,096.36</a:t>
                       </a:r>
                     </a:p>
                   </a:txBody>
@@ -3394,7 +3394,7 @@
                         <a:rPr sz="900">
                           <a:latin typeface="Segoe UI"/>
                         </a:rPr>
-                        <a:t>Tier 1  |  19.92% / 15.00%</a:t>
+                        <a:t>Tier 1  |  20.30% / 15.00%</a:t>
                       </a:r>
                     </a:p>
                   </a:txBody>
@@ -3431,7 +3431,7 @@
                         <a:rPr sz="900">
                           <a:latin typeface="Segoe UI"/>
                         </a:rPr>
-                        <a:t>$2,296,403.76  (92.0% achieved)</a:t>
+                        <a:t>$2,296,403.76  (85.9% achieved)</a:t>
                       </a:r>
                     </a:p>
                   </a:txBody>
@@ -3690,7 +3690,7 @@
                         <a:rPr sz="900">
                           <a:latin typeface="Segoe UI"/>
                         </a:rPr>
-                        <a:t>Fleet Bound Premium: $527,986.49</a:t>
+                        <a:t>Fleet Bound Premium: $258,618.58</a:t>
                       </a:r>
                     </a:p>
                   </a:txBody>
@@ -3727,7 +3727,7 @@
                         <a:rPr sz="900">
                           <a:latin typeface="Segoe UI"/>
                         </a:rPr>
-                        <a:t>Fleet Book %: 25.0%</a:t>
+                        <a:t>Fleet Book %: 13.1%</a:t>
                       </a:r>
                     </a:p>
                   </a:txBody>
@@ -3766,7 +3766,7 @@
                         <a:rPr sz="900">
                           <a:latin typeface="Segoe UI"/>
                         </a:rPr>
-                        <a:t>Non-Fleet Subs: 251  |  Binds: 52</a:t>
+                        <a:t>Non-Fleet Subs: 251  |  Binds: 53</a:t>
                       </a:r>
                     </a:p>
                   </a:txBody>
@@ -3803,7 +3803,7 @@
                         <a:rPr sz="900">
                           <a:latin typeface="Segoe UI"/>
                         </a:rPr>
-                        <a:t>Non-Fleet Bound Premium: $1,584,781.94</a:t>
+                        <a:t>Non-Fleet Bound Premium: $1,714,477.78</a:t>
                       </a:r>
                     </a:p>
                   </a:txBody>
@@ -3840,7 +3840,7 @@
                         <a:rPr sz="900">
                           <a:latin typeface="Segoe UI"/>
                         </a:rPr>
-                        <a:t>Non-Fleet Book %: 75.0%</a:t>
+                        <a:t>Non-Fleet Book %: 86.9%</a:t>
                       </a:r>
                     </a:p>
                   </a:txBody>
@@ -4428,7 +4428,7 @@
                           </a:solidFill>
                           <a:latin typeface="Segoe UI"/>
                         </a:rPr>
-                        <a:t>32</a:t>
+                        <a:t>33</a:t>
                       </a:r>
                     </a:p>
                   </a:txBody>
@@ -4707,7 +4707,7 @@
                           </a:solidFill>
                           <a:latin typeface="Segoe UI"/>
                         </a:rPr>
-                        <a:t>9.4%</a:t>
+                        <a:t>15.2%</a:t>
                       </a:r>
                     </a:p>
                   </a:txBody>
@@ -4983,7 +4983,7 @@
                           </a:solidFill>
                           <a:latin typeface="Segoe UI"/>
                         </a:rPr>
-                        <a:t>3</a:t>
+                        <a:t>5</a:t>
                       </a:r>
                     </a:p>
                   </a:txBody>
@@ -5256,13 +5256,10 @@
                     <a:p>
                       <a:pPr algn="ctr"/>
                       <a:r>
-                        <a:rPr sz="800" b="1">
-                          <a:solidFill>
-                            <a:srgbClr val="DC2626"/>
-                          </a:solidFill>
+                        <a:rPr sz="800">
                           <a:latin typeface="Segoe UI"/>
                         </a:rPr>
-                        <a:t>$93.6K</a:t>
+                        <a:t/>
                       </a:r>
                     </a:p>
                   </a:txBody>

--- a/generated/Tier 1 Broker Scorecards/Velocity Insurance Multiservices LLC_Broker_Scorecard.pptx
+++ b/generated/Tier 1 Broker Scorecards/Velocity Insurance Multiservices LLC_Broker_Scorecard.pptx
@@ -3394,7 +3394,7 @@
                         <a:rPr sz="900">
                           <a:latin typeface="Segoe UI"/>
                         </a:rPr>
-                        <a:t>Tier 1  |  20.30% / 15.00%</a:t>
+                        <a:t>Tier 1  |  19.03% / 15.00%</a:t>
                       </a:r>
                     </a:p>
                   </a:txBody>
@@ -3653,7 +3653,7 @@
                         <a:rPr sz="900">
                           <a:latin typeface="Segoe UI"/>
                         </a:rPr>
-                        <a:t>Fleet Subs: 15  |  Binds: 1</a:t>
+                        <a:t>Fleet Subs: 15  |  Binds: 0</a:t>
                       </a:r>
                     </a:p>
                   </a:txBody>
@@ -3690,7 +3690,7 @@
                         <a:rPr sz="900">
                           <a:latin typeface="Segoe UI"/>
                         </a:rPr>
-                        <a:t>Fleet Bound Premium: $258,618.58</a:t>
+                        <a:t>Fleet Bound Premium: $0.00</a:t>
                       </a:r>
                     </a:p>
                   </a:txBody>
@@ -3727,7 +3727,7 @@
                         <a:rPr sz="900">
                           <a:latin typeface="Segoe UI"/>
                         </a:rPr>
-                        <a:t>Fleet Book %: 13.1%</a:t>
+                        <a:t>Fleet Book %: 0.0%</a:t>
                       </a:r>
                     </a:p>
                   </a:txBody>
@@ -3766,7 +3766,7 @@
                         <a:rPr sz="900">
                           <a:latin typeface="Segoe UI"/>
                         </a:rPr>
-                        <a:t>Non-Fleet Subs: 251  |  Binds: 53</a:t>
+                        <a:t>Non-Fleet Subs: 253  |  Binds: 51</a:t>
                       </a:r>
                     </a:p>
                   </a:txBody>
@@ -3803,7 +3803,7 @@
                         <a:rPr sz="900">
                           <a:latin typeface="Segoe UI"/>
                         </a:rPr>
-                        <a:t>Non-Fleet Bound Premium: $1,714,477.78</a:t>
+                        <a:t>Non-Fleet Bound Premium: $1,973,096.36</a:t>
                       </a:r>
                     </a:p>
                   </a:txBody>
@@ -3840,7 +3840,7 @@
                         <a:rPr sz="900">
                           <a:latin typeface="Segoe UI"/>
                         </a:rPr>
-                        <a:t>Non-Fleet Book %: 86.9%</a:t>
+                        <a:t>Non-Fleet Book %: 100.0%</a:t>
                       </a:r>
                     </a:p>
                   </a:txBody>
@@ -4428,7 +4428,7 @@
                           </a:solidFill>
                           <a:latin typeface="Segoe UI"/>
                         </a:rPr>
-                        <a:t>33</a:t>
+                        <a:t>37</a:t>
                       </a:r>
                     </a:p>
                   </a:txBody>
@@ -4707,7 +4707,7 @@
                           </a:solidFill>
                           <a:latin typeface="Segoe UI"/>
                         </a:rPr>
-                        <a:t>15.2%</a:t>
+                        <a:t>10.8%</a:t>
                       </a:r>
                     </a:p>
                   </a:txBody>
@@ -4983,7 +4983,7 @@
                           </a:solidFill>
                           <a:latin typeface="Segoe UI"/>
                         </a:rPr>
-                        <a:t>5</a:t>
+                        <a:t>4</a:t>
                       </a:r>
                     </a:p>
                   </a:txBody>

--- a/generated/Tier 1 Broker Scorecards/Velocity Insurance Multiservices LLC_Broker_Scorecard.pptx
+++ b/generated/Tier 1 Broker Scorecards/Velocity Insurance Multiservices LLC_Broker_Scorecard.pptx
@@ -3357,7 +3357,7 @@
                         <a:rPr sz="800">
                           <a:latin typeface="Segoe UI"/>
                         </a:rPr>
-                        <a:t>$1,640,288.40 / $3,254,974.68 / $1,973,096.36</a:t>
+                        <a:t>$1,640,288.40 / $3,325,256.57 / $2,043,378.25</a:t>
                       </a:r>
                     </a:p>
                   </a:txBody>
@@ -3394,7 +3394,7 @@
                         <a:rPr sz="900">
                           <a:latin typeface="Segoe UI"/>
                         </a:rPr>
-                        <a:t>Tier 1  |  19.03% / 15.00%</a:t>
+                        <a:t>Tier 1  |  19.26% / 15.00%</a:t>
                       </a:r>
                     </a:p>
                   </a:txBody>
@@ -3431,7 +3431,7 @@
                         <a:rPr sz="900">
                           <a:latin typeface="Segoe UI"/>
                         </a:rPr>
-                        <a:t>$2,296,403.76  (85.9% achieved)</a:t>
+                        <a:t>$2,296,403.76  (89.0% achieved)</a:t>
                       </a:r>
                     </a:p>
                   </a:txBody>
@@ -3766,7 +3766,7 @@
                         <a:rPr sz="900">
                           <a:latin typeface="Segoe UI"/>
                         </a:rPr>
-                        <a:t>Non-Fleet Subs: 253  |  Binds: 51</a:t>
+                        <a:t>Non-Fleet Subs: 255  |  Binds: 52</a:t>
                       </a:r>
                     </a:p>
                   </a:txBody>
@@ -3803,7 +3803,7 @@
                         <a:rPr sz="900">
                           <a:latin typeface="Segoe UI"/>
                         </a:rPr>
-                        <a:t>Non-Fleet Bound Premium: $1,973,096.36</a:t>
+                        <a:t>Non-Fleet Bound Premium: $2,043,378.25</a:t>
                       </a:r>
                     </a:p>
                   </a:txBody>
@@ -4423,12 +4423,9 @@
                       <a:pPr algn="ctr"/>
                       <a:r>
                         <a:rPr sz="800">
-                          <a:solidFill>
-                            <a:srgbClr val="DC2626"/>
-                          </a:solidFill>
                           <a:latin typeface="Segoe UI"/>
                         </a:rPr>
-                        <a:t>37</a:t>
+                        <a:t>40</a:t>
                       </a:r>
                     </a:p>
                   </a:txBody>
@@ -4707,7 +4704,7 @@
                           </a:solidFill>
                           <a:latin typeface="Segoe UI"/>
                         </a:rPr>
-                        <a:t>10.8%</a:t>
+                        <a:t>12.5%</a:t>
                       </a:r>
                     </a:p>
                   </a:txBody>
@@ -4983,7 +4980,7 @@
                           </a:solidFill>
                           <a:latin typeface="Segoe UI"/>
                         </a:rPr>
-                        <a:t>4</a:t>
+                        <a:t>5</a:t>
                       </a:r>
                     </a:p>
                   </a:txBody>
@@ -5256,10 +5253,13 @@
                     <a:p>
                       <a:pPr algn="ctr"/>
                       <a:r>
-                        <a:rPr sz="800">
+                        <a:rPr sz="800" b="1">
+                          <a:solidFill>
+                            <a:srgbClr val="DC2626"/>
+                          </a:solidFill>
                           <a:latin typeface="Segoe UI"/>
                         </a:rPr>
-                        <a:t/>
+                        <a:t>$24.2K</a:t>
                       </a:r>
                     </a:p>
                   </a:txBody>

--- a/generated/Tier 1 Broker Scorecards/Velocity Insurance Multiservices LLC_Broker_Scorecard.pptx
+++ b/generated/Tier 1 Broker Scorecards/Velocity Insurance Multiservices LLC_Broker_Scorecard.pptx
@@ -3357,7 +3357,7 @@
                         <a:rPr sz="800">
                           <a:latin typeface="Segoe UI"/>
                         </a:rPr>
-                        <a:t>$1,640,288.40 / $3,325,256.57 / $2,043,378.25</a:t>
+                        <a:t>$1,640,288.40 / $3,344,814.72 / $2,062,936.40</a:t>
                       </a:r>
                     </a:p>
                   </a:txBody>
@@ -3431,7 +3431,7 @@
                         <a:rPr sz="900">
                           <a:latin typeface="Segoe UI"/>
                         </a:rPr>
-                        <a:t>$2,296,403.76  (89.0% achieved)</a:t>
+                        <a:t>$2,296,403.76  (89.8% achieved)</a:t>
                       </a:r>
                     </a:p>
                   </a:txBody>
@@ -3803,7 +3803,7 @@
                         <a:rPr sz="900">
                           <a:latin typeface="Segoe UI"/>
                         </a:rPr>
-                        <a:t>Non-Fleet Bound Premium: $2,043,378.25</a:t>
+                        <a:t>Non-Fleet Bound Premium: $2,062,936.40</a:t>
                       </a:r>
                     </a:p>
                   </a:txBody>
@@ -4423,9 +4423,12 @@
                       <a:pPr algn="ctr"/>
                       <a:r>
                         <a:rPr sz="800">
+                          <a:solidFill>
+                            <a:srgbClr val="059669"/>
+                          </a:solidFill>
                           <a:latin typeface="Segoe UI"/>
                         </a:rPr>
-                        <a:t>40</a:t>
+                        <a:t>42</a:t>
                       </a:r>
                     </a:p>
                   </a:txBody>
@@ -4704,7 +4707,7 @@
                           </a:solidFill>
                           <a:latin typeface="Segoe UI"/>
                         </a:rPr>
-                        <a:t>12.5%</a:t>
+                        <a:t>14.3%</a:t>
                       </a:r>
                     </a:p>
                   </a:txBody>
@@ -4980,7 +4983,7 @@
                           </a:solidFill>
                           <a:latin typeface="Segoe UI"/>
                         </a:rPr>
-                        <a:t>5</a:t>
+                        <a:t>6</a:t>
                       </a:r>
                     </a:p>
                   </a:txBody>
@@ -5259,7 +5262,7 @@
                           </a:solidFill>
                           <a:latin typeface="Segoe UI"/>
                         </a:rPr>
-                        <a:t>$24.2K</a:t>
+                        <a:t>$43.8K</a:t>
                       </a:r>
                     </a:p>
                   </a:txBody>

--- a/generated/Tier 1 Broker Scorecards/Velocity Insurance Multiservices LLC_Broker_Scorecard.pptx
+++ b/generated/Tier 1 Broker Scorecards/Velocity Insurance Multiservices LLC_Broker_Scorecard.pptx
@@ -3357,7 +3357,7 @@
                         <a:rPr sz="800">
                           <a:latin typeface="Segoe UI"/>
                         </a:rPr>
-                        <a:t>$1,640,288.40 / $3,344,814.72 / $2,062,936.40</a:t>
+                        <a:t>$1,640,288.40 / $3,374,159.61 / $2,092,281.29</a:t>
                       </a:r>
                     </a:p>
                   </a:txBody>
@@ -3394,7 +3394,7 @@
                         <a:rPr sz="900">
                           <a:latin typeface="Segoe UI"/>
                         </a:rPr>
-                        <a:t>Tier 1  |  19.26% / 15.00%</a:t>
+                        <a:t>Tier 1  |  19.56% / 15.00%</a:t>
                       </a:r>
                     </a:p>
                   </a:txBody>
@@ -3431,7 +3431,7 @@
                         <a:rPr sz="900">
                           <a:latin typeface="Segoe UI"/>
                         </a:rPr>
-                        <a:t>$2,296,403.76  (89.8% achieved)</a:t>
+                        <a:t>$2,296,403.76  (91.1% achieved)</a:t>
                       </a:r>
                     </a:p>
                   </a:txBody>
@@ -3653,7 +3653,7 @@
                         <a:rPr sz="900">
                           <a:latin typeface="Segoe UI"/>
                         </a:rPr>
-                        <a:t>Fleet Subs: 15  |  Binds: 0</a:t>
+                        <a:t>Fleet Subs: 16  |  Binds: 0</a:t>
                       </a:r>
                     </a:p>
                   </a:txBody>
@@ -3766,7 +3766,7 @@
                         <a:rPr sz="900">
                           <a:latin typeface="Segoe UI"/>
                         </a:rPr>
-                        <a:t>Non-Fleet Subs: 255  |  Binds: 52</a:t>
+                        <a:t>Non-Fleet Subs: 255  |  Binds: 53</a:t>
                       </a:r>
                     </a:p>
                   </a:txBody>
@@ -3803,7 +3803,7 @@
                         <a:rPr sz="900">
                           <a:latin typeface="Segoe UI"/>
                         </a:rPr>
-                        <a:t>Non-Fleet Bound Premium: $2,062,936.40</a:t>
+                        <a:t>Non-Fleet Bound Premium: $2,092,281.29</a:t>
                       </a:r>
                     </a:p>
                   </a:txBody>
@@ -4428,7 +4428,7 @@
                           </a:solidFill>
                           <a:latin typeface="Segoe UI"/>
                         </a:rPr>
-                        <a:t>42</a:t>
+                        <a:t>43</a:t>
                       </a:r>
                     </a:p>
                   </a:txBody>
@@ -4707,7 +4707,7 @@
                           </a:solidFill>
                           <a:latin typeface="Segoe UI"/>
                         </a:rPr>
-                        <a:t>14.3%</a:t>
+                        <a:t>16.3%</a:t>
                       </a:r>
                     </a:p>
                   </a:txBody>
@@ -4983,7 +4983,7 @@
                           </a:solidFill>
                           <a:latin typeface="Segoe UI"/>
                         </a:rPr>
-                        <a:t>6</a:t>
+                        <a:t>7</a:t>
                       </a:r>
                     </a:p>
                   </a:txBody>
@@ -5262,7 +5262,7 @@
                           </a:solidFill>
                           <a:latin typeface="Segoe UI"/>
                         </a:rPr>
-                        <a:t>$43.8K</a:t>
+                        <a:t>$73.1K</a:t>
                       </a:r>
                     </a:p>
                   </a:txBody>

--- a/generated/Tier 1 Broker Scorecards/Velocity Insurance Multiservices LLC_Broker_Scorecard.pptx
+++ b/generated/Tier 1 Broker Scorecards/Velocity Insurance Multiservices LLC_Broker_Scorecard.pptx
@@ -3357,7 +3357,7 @@
                         <a:rPr sz="800">
                           <a:latin typeface="Segoe UI"/>
                         </a:rPr>
-                        <a:t>$1,640,288.40 / $3,374,159.61 / $2,092,281.29</a:t>
+                        <a:t>$1,640,288.40 / $3,356,744.72 / $2,074,866.40</a:t>
                       </a:r>
                     </a:p>
                   </a:txBody>
@@ -3394,7 +3394,7 @@
                         <a:rPr sz="900">
                           <a:latin typeface="Segoe UI"/>
                         </a:rPr>
-                        <a:t>Tier 1  |  19.56% / 15.00%</a:t>
+                        <a:t>Tier 1  |  19.93% / 15.00%</a:t>
                       </a:r>
                     </a:p>
                   </a:txBody>
@@ -3431,7 +3431,7 @@
                         <a:rPr sz="900">
                           <a:latin typeface="Segoe UI"/>
                         </a:rPr>
-                        <a:t>$2,296,403.76  (91.1% achieved)</a:t>
+                        <a:t>$2,296,403.76  (90.4% achieved)</a:t>
                       </a:r>
                     </a:p>
                   </a:txBody>
@@ -3653,7 +3653,7 @@
                         <a:rPr sz="900">
                           <a:latin typeface="Segoe UI"/>
                         </a:rPr>
-                        <a:t>Fleet Subs: 16  |  Binds: 0</a:t>
+                        <a:t>Fleet Subs: 16  |  Binds: 1</a:t>
                       </a:r>
                     </a:p>
                   </a:txBody>
@@ -3690,7 +3690,7 @@
                         <a:rPr sz="900">
                           <a:latin typeface="Segoe UI"/>
                         </a:rPr>
-                        <a:t>Fleet Bound Premium: $0.00</a:t>
+                        <a:t>Fleet Bound Premium: $267,206.03</a:t>
                       </a:r>
                     </a:p>
                   </a:txBody>
@@ -3727,7 +3727,7 @@
                         <a:rPr sz="900">
                           <a:latin typeface="Segoe UI"/>
                         </a:rPr>
-                        <a:t>Fleet Book %: 0.0%</a:t>
+                        <a:t>Fleet Book %: 12.9%</a:t>
                       </a:r>
                     </a:p>
                   </a:txBody>
@@ -3803,7 +3803,7 @@
                         <a:rPr sz="900">
                           <a:latin typeface="Segoe UI"/>
                         </a:rPr>
-                        <a:t>Non-Fleet Bound Premium: $2,092,281.29</a:t>
+                        <a:t>Non-Fleet Bound Premium: $1,807,660.37</a:t>
                       </a:r>
                     </a:p>
                   </a:txBody>
@@ -3840,7 +3840,7 @@
                         <a:rPr sz="900">
                           <a:latin typeface="Segoe UI"/>
                         </a:rPr>
-                        <a:t>Non-Fleet Book %: 100.0%</a:t>
+                        <a:t>Non-Fleet Book %: 87.1%</a:t>
                       </a:r>
                     </a:p>
                   </a:txBody>
@@ -4707,7 +4707,7 @@
                           </a:solidFill>
                           <a:latin typeface="Segoe UI"/>
                         </a:rPr>
-                        <a:t>16.3%</a:t>
+                        <a:t>20.9%</a:t>
                       </a:r>
                     </a:p>
                   </a:txBody>
@@ -4983,7 +4983,7 @@
                           </a:solidFill>
                           <a:latin typeface="Segoe UI"/>
                         </a:rPr>
-                        <a:t>7</a:t>
+                        <a:t>9</a:t>
                       </a:r>
                     </a:p>
                   </a:txBody>
@@ -5262,7 +5262,7 @@
                           </a:solidFill>
                           <a:latin typeface="Segoe UI"/>
                         </a:rPr>
-                        <a:t>$73.1K</a:t>
+                        <a:t>$55.7K</a:t>
                       </a:r>
                     </a:p>
                   </a:txBody>

--- a/generated/Tier 1 Broker Scorecards/Velocity Insurance Multiservices LLC_Broker_Scorecard.pptx
+++ b/generated/Tier 1 Broker Scorecards/Velocity Insurance Multiservices LLC_Broker_Scorecard.pptx
@@ -3357,7 +3357,7 @@
                         <a:rPr sz="800">
                           <a:latin typeface="Segoe UI"/>
                         </a:rPr>
-                        <a:t>$1,640,288.40 / $3,356,744.72 / $2,074,866.40</a:t>
+                        <a:t>$1,640,288.40 / $3,284,409.88 / $2,002,531.56</a:t>
                       </a:r>
                     </a:p>
                   </a:txBody>
@@ -3394,7 +3394,7 @@
                         <a:rPr sz="900">
                           <a:latin typeface="Segoe UI"/>
                         </a:rPr>
-                        <a:t>Tier 1  |  19.93% / 15.00%</a:t>
+                        <a:t>Tier 1  |  20.30% / 15.00%</a:t>
                       </a:r>
                     </a:p>
                   </a:txBody>
@@ -3431,7 +3431,7 @@
                         <a:rPr sz="900">
                           <a:latin typeface="Segoe UI"/>
                         </a:rPr>
-                        <a:t>$2,296,403.76  (90.4% achieved)</a:t>
+                        <a:t>$2,296,403.76  (87.2% achieved)</a:t>
                       </a:r>
                     </a:p>
                   </a:txBody>
@@ -3653,7 +3653,7 @@
                         <a:rPr sz="900">
                           <a:latin typeface="Segoe UI"/>
                         </a:rPr>
-                        <a:t>Fleet Subs: 16  |  Binds: 1</a:t>
+                        <a:t>Fleet Subs: 15  |  Binds: 0</a:t>
                       </a:r>
                     </a:p>
                   </a:txBody>
@@ -3690,7 +3690,7 @@
                         <a:rPr sz="900">
                           <a:latin typeface="Segoe UI"/>
                         </a:rPr>
-                        <a:t>Fleet Bound Premium: $267,206.03</a:t>
+                        <a:t>Fleet Bound Premium: $0.00</a:t>
                       </a:r>
                     </a:p>
                   </a:txBody>
@@ -3727,7 +3727,7 @@
                         <a:rPr sz="900">
                           <a:latin typeface="Segoe UI"/>
                         </a:rPr>
-                        <a:t>Fleet Book %: 12.9%</a:t>
+                        <a:t>Fleet Book %: 0.0%</a:t>
                       </a:r>
                     </a:p>
                   </a:txBody>
@@ -3766,7 +3766,7 @@
                         <a:rPr sz="900">
                           <a:latin typeface="Segoe UI"/>
                         </a:rPr>
-                        <a:t>Non-Fleet Subs: 255  |  Binds: 53</a:t>
+                        <a:t>Non-Fleet Subs: 256  |  Binds: 55</a:t>
                       </a:r>
                     </a:p>
                   </a:txBody>
@@ -3803,7 +3803,7 @@
                         <a:rPr sz="900">
                           <a:latin typeface="Segoe UI"/>
                         </a:rPr>
-                        <a:t>Non-Fleet Bound Premium: $1,807,660.37</a:t>
+                        <a:t>Non-Fleet Bound Premium: $2,002,531.56</a:t>
                       </a:r>
                     </a:p>
                   </a:txBody>
@@ -3840,7 +3840,7 @@
                         <a:rPr sz="900">
                           <a:latin typeface="Segoe UI"/>
                         </a:rPr>
-                        <a:t>Non-Fleet Book %: 87.1%</a:t>
+                        <a:t>Non-Fleet Book %: 100.0%</a:t>
                       </a:r>
                     </a:p>
                   </a:txBody>
@@ -5256,13 +5256,10 @@
                     <a:p>
                       <a:pPr algn="ctr"/>
                       <a:r>
-                        <a:rPr sz="800" b="1">
-                          <a:solidFill>
-                            <a:srgbClr val="DC2626"/>
-                          </a:solidFill>
+                        <a:rPr sz="800">
                           <a:latin typeface="Segoe UI"/>
                         </a:rPr>
-                        <a:t>$55.7K</a:t>
+                        <a:t/>
                       </a:r>
                     </a:p>
                   </a:txBody>

--- a/generated/Tier 1 Broker Scorecards/Velocity Insurance Multiservices LLC_Broker_Scorecard.pptx
+++ b/generated/Tier 1 Broker Scorecards/Velocity Insurance Multiservices LLC_Broker_Scorecard.pptx
@@ -3357,7 +3357,7 @@
                         <a:rPr sz="800">
                           <a:latin typeface="Segoe UI"/>
                         </a:rPr>
-                        <a:t>$1,640,288.40 / $3,284,409.88 / $2,002,531.56</a:t>
+                        <a:t>$1,640,288.40 / $3,284,086.45 / $2,002,208.13</a:t>
                       </a:r>
                     </a:p>
                   </a:txBody>
@@ -3394,7 +3394,7 @@
                         <a:rPr sz="900">
                           <a:latin typeface="Segoe UI"/>
                         </a:rPr>
-                        <a:t>Tier 1  |  20.30% / 15.00%</a:t>
+                        <a:t>Tier 1  |  19.56% / 15.00%</a:t>
                       </a:r>
                     </a:p>
                   </a:txBody>
@@ -3766,7 +3766,7 @@
                         <a:rPr sz="900">
                           <a:latin typeface="Segoe UI"/>
                         </a:rPr>
-                        <a:t>Non-Fleet Subs: 256  |  Binds: 55</a:t>
+                        <a:t>Non-Fleet Subs: 256  |  Binds: 53</a:t>
                       </a:r>
                     </a:p>
                   </a:txBody>
@@ -3803,7 +3803,7 @@
                         <a:rPr sz="900">
                           <a:latin typeface="Segoe UI"/>
                         </a:rPr>
-                        <a:t>Non-Fleet Bound Premium: $2,002,531.56</a:t>
+                        <a:t>Non-Fleet Bound Premium: $2,002,208.13</a:t>
                       </a:r>
                     </a:p>
                   </a:txBody>
@@ -4428,7 +4428,7 @@
                           </a:solidFill>
                           <a:latin typeface="Segoe UI"/>
                         </a:rPr>
-                        <a:t>43</a:t>
+                        <a:t>44</a:t>
                       </a:r>
                     </a:p>
                   </a:txBody>
@@ -4624,7 +4624,7 @@
                           </a:solidFill>
                           <a:latin typeface="Segoe UI"/>
                         </a:rPr>
-                        <a:t>19.4%</a:t>
+                        <a:t>17.9%</a:t>
                       </a:r>
                     </a:p>
                   </a:txBody>
@@ -4707,7 +4707,7 @@
                           </a:solidFill>
                           <a:latin typeface="Segoe UI"/>
                         </a:rPr>
-                        <a:t>20.9%</a:t>
+                        <a:t>22.7%</a:t>
                       </a:r>
                     </a:p>
                   </a:txBody>
@@ -4906,7 +4906,7 @@
                           </a:solidFill>
                           <a:latin typeface="Segoe UI"/>
                         </a:rPr>
-                        <a:t>13</a:t>
+                        <a:t>12</a:t>
                       </a:r>
                     </a:p>
                   </a:txBody>
@@ -4983,7 +4983,7 @@
                           </a:solidFill>
                           <a:latin typeface="Segoe UI"/>
                         </a:rPr>
-                        <a:t>9</a:t>
+                        <a:t>10</a:t>
                       </a:r>
                     </a:p>
                   </a:txBody>

--- a/generated/Tier 1 Broker Scorecards/Velocity Insurance Multiservices LLC_Broker_Scorecard.pptx
+++ b/generated/Tier 1 Broker Scorecards/Velocity Insurance Multiservices LLC_Broker_Scorecard.pptx
@@ -3357,7 +3357,7 @@
                         <a:rPr sz="800">
                           <a:latin typeface="Segoe UI"/>
                         </a:rPr>
-                        <a:t>$1,640,288.40 / $3,284,086.45 / $2,002,208.13</a:t>
+                        <a:t>$1,640,288.40 / $3,299,273.21 / $2,017,394.89</a:t>
                       </a:r>
                     </a:p>
                   </a:txBody>
@@ -3394,7 +3394,7 @@
                         <a:rPr sz="900">
                           <a:latin typeface="Segoe UI"/>
                         </a:rPr>
-                        <a:t>Tier 1  |  19.56% / 15.00%</a:t>
+                        <a:t>Tier 1  |  20.15% / 15.00%</a:t>
                       </a:r>
                     </a:p>
                   </a:txBody>
@@ -3431,7 +3431,7 @@
                         <a:rPr sz="900">
                           <a:latin typeface="Segoe UI"/>
                         </a:rPr>
-                        <a:t>$2,296,403.76  (87.2% achieved)</a:t>
+                        <a:t>$2,296,403.76  (87.9% achieved)</a:t>
                       </a:r>
                     </a:p>
                   </a:txBody>
@@ -3766,7 +3766,7 @@
                         <a:rPr sz="900">
                           <a:latin typeface="Segoe UI"/>
                         </a:rPr>
-                        <a:t>Non-Fleet Subs: 256  |  Binds: 53</a:t>
+                        <a:t>Non-Fleet Subs: 258  |  Binds: 55</a:t>
                       </a:r>
                     </a:p>
                   </a:txBody>
@@ -3803,7 +3803,7 @@
                         <a:rPr sz="900">
                           <a:latin typeface="Segoe UI"/>
                         </a:rPr>
-                        <a:t>Non-Fleet Bound Premium: $2,002,208.13</a:t>
+                        <a:t>Non-Fleet Bound Premium: $2,017,394.89</a:t>
                       </a:r>
                     </a:p>
                   </a:txBody>
@@ -4428,7 +4428,7 @@
                           </a:solidFill>
                           <a:latin typeface="Segoe UI"/>
                         </a:rPr>
-                        <a:t>44</a:t>
+                        <a:t>47</a:t>
                       </a:r>
                     </a:p>
                   </a:txBody>
@@ -4624,7 +4624,7 @@
                           </a:solidFill>
                           <a:latin typeface="Segoe UI"/>
                         </a:rPr>
-                        <a:t>17.9%</a:t>
+                        <a:t>19.4%</a:t>
                       </a:r>
                     </a:p>
                   </a:txBody>
@@ -4707,7 +4707,7 @@
                           </a:solidFill>
                           <a:latin typeface="Segoe UI"/>
                         </a:rPr>
-                        <a:t>22.7%</a:t>
+                        <a:t>23.4%</a:t>
                       </a:r>
                     </a:p>
                   </a:txBody>
@@ -4906,7 +4906,7 @@
                           </a:solidFill>
                           <a:latin typeface="Segoe UI"/>
                         </a:rPr>
-                        <a:t>12</a:t>
+                        <a:t>13</a:t>
                       </a:r>
                     </a:p>
                   </a:txBody>
@@ -4983,7 +4983,7 @@
                           </a:solidFill>
                           <a:latin typeface="Segoe UI"/>
                         </a:rPr>
-                        <a:t>10</a:t>
+                        <a:t>11</a:t>
                       </a:r>
                     </a:p>
                   </a:txBody>

--- a/generated/Tier 1 Broker Scorecards/Velocity Insurance Multiservices LLC_Broker_Scorecard.pptx
+++ b/generated/Tier 1 Broker Scorecards/Velocity Insurance Multiservices LLC_Broker_Scorecard.pptx
@@ -3394,7 +3394,7 @@
                         <a:rPr sz="900">
                           <a:latin typeface="Segoe UI"/>
                         </a:rPr>
-                        <a:t>Tier 1  |  20.15% / 15.00%</a:t>
+                        <a:t>Tier 1  |  20.07% / 15.00%</a:t>
                       </a:r>
                     </a:p>
                   </a:txBody>
@@ -3766,7 +3766,7 @@
                         <a:rPr sz="900">
                           <a:latin typeface="Segoe UI"/>
                         </a:rPr>
-                        <a:t>Non-Fleet Subs: 258  |  Binds: 55</a:t>
+                        <a:t>Non-Fleet Subs: 259  |  Binds: 55</a:t>
                       </a:r>
                     </a:p>
                   </a:txBody>
@@ -4428,7 +4428,7 @@
                           </a:solidFill>
                           <a:latin typeface="Segoe UI"/>
                         </a:rPr>
-                        <a:t>47</a:t>
+                        <a:t>48</a:t>
                       </a:r>
                     </a:p>
                   </a:txBody>
@@ -4707,7 +4707,7 @@
                           </a:solidFill>
                           <a:latin typeface="Segoe UI"/>
                         </a:rPr>
-                        <a:t>23.4%</a:t>
+                        <a:t>22.9%</a:t>
                       </a:r>
                     </a:p>
                   </a:txBody>

--- a/generated/Tier 1 Broker Scorecards/Velocity Insurance Multiservices LLC_Broker_Scorecard.pptx
+++ b/generated/Tier 1 Broker Scorecards/Velocity Insurance Multiservices LLC_Broker_Scorecard.pptx
@@ -3357,7 +3357,7 @@
                         <a:rPr sz="800">
                           <a:latin typeface="Segoe UI"/>
                         </a:rPr>
-                        <a:t>$1,640,288.40 / $3,299,273.21 / $2,017,394.89</a:t>
+                        <a:t>$1,640,288.40 / $3,189,977.52 / $2,017,394.89</a:t>
                       </a:r>
                     </a:p>
                   </a:txBody>
